--- a/sample.pptx
+++ b/sample.pptx
@@ -3075,8 +3075,19 @@
           <a:lstStyle/>
           <a:p>
             <a:r>
-              <a:rPr lang="en-US" smtClean="0"/>
-              <a:t>sakshi</a:t>
+              <a:rPr lang="en-US" dirty="0" err="1" smtClean="0"/>
+              <a:t>Sakshi</a:t>
+            </a:r>
+            <a:r>
+              <a:rPr lang="en-US" dirty="0" smtClean="0"/>
+              <a:t/>
+            </a:r>
+            <a:br>
+              <a:rPr lang="en-US" dirty="0" smtClean="0"/>
+            </a:br>
+            <a:r>
+              <a:rPr lang="en-US" smtClean="0"/>
+              <a:t>gayatri</a:t>
             </a:r>
             <a:endParaRPr lang="en-IN"/>
           </a:p>
